--- a/2026-04-03 El Camino Set (CHORDS).pptx
+++ b/2026-04-03 El Camino Set (CHORDS).pptx
@@ -24,9 +24,9 @@
     <p:sldId id="300" r:id="rId18"/>
     <p:sldId id="324" r:id="rId19"/>
     <p:sldId id="302" r:id="rId20"/>
-    <p:sldId id="303" r:id="rId21"/>
+    <p:sldId id="328" r:id="rId21"/>
     <p:sldId id="285" r:id="rId22"/>
-    <p:sldId id="304" r:id="rId23"/>
+    <p:sldId id="327" r:id="rId23"/>
     <p:sldId id="305" r:id="rId24"/>
     <p:sldId id="306" r:id="rId25"/>
     <p:sldId id="325" r:id="rId26"/>
@@ -4981,6 +4981,71 @@
           </a:p>
         </p:txBody>
       </p:sp>
+      <p:sp>
+        <p:nvSpPr>
+          <p:cNvPr id="2" name="TextBox 1">
+            <a:extLst>
+              <a:ext uri="{FF2B5EF4-FFF2-40B4-BE49-F238E27FC236}">
+                <a16:creationId xmlns:a16="http://schemas.microsoft.com/office/drawing/2014/main" id="{D5A707BE-8340-8280-7CCC-55B0444C76AD}"/>
+              </a:ext>
+            </a:extLst>
+          </p:cNvPr>
+          <p:cNvSpPr txBox="1"/>
+          <p:nvPr/>
+        </p:nvSpPr>
+        <p:spPr>
+          <a:xfrm>
+            <a:off x="11277600" y="6378411"/>
+            <a:ext cx="703385" cy="369332"/>
+          </a:xfrm>
+          <a:prstGeom prst="rect">
+            <a:avLst/>
+          </a:prstGeom>
+          <a:noFill/>
+        </p:spPr>
+        <p:txBody>
+          <a:bodyPr wrap="square" rtlCol="0">
+            <a:spAutoFit/>
+          </a:bodyPr>
+          <a:lstStyle/>
+          <a:p>
+            <a:pPr marL="0" marR="0" lvl="0" indent="0" algn="l" defTabSz="914400" rtl="0" eaLnBrk="1" fontAlgn="auto" latinLnBrk="0" hangingPunct="1">
+              <a:lnSpc>
+                <a:spcPct val="100000"/>
+              </a:lnSpc>
+              <a:spcBef>
+                <a:spcPts val="0"/>
+              </a:spcBef>
+              <a:spcAft>
+                <a:spcPts val="0"/>
+              </a:spcAft>
+              <a:buClrTx/>
+              <a:buSzTx/>
+              <a:buFontTx/>
+              <a:buNone/>
+              <a:tabLst/>
+              <a:defRPr/>
+            </a:pPr>
+            <a:r>
+              <a:rPr kumimoji="0" lang="en-US" sz="1800" b="1" i="0" u="none" strike="noStrike" kern="1200" cap="none" spc="0" normalizeH="0" baseline="0" noProof="0" dirty="0">
+                <a:ln>
+                  <a:noFill/>
+                </a:ln>
+                <a:solidFill>
+                  <a:srgbClr val="FF0000"/>
+                </a:solidFill>
+                <a:effectLst/>
+                <a:uLnTx/>
+                <a:uFillTx/>
+                <a:latin typeface="Avenir Book" panose="02000503020000020003" pitchFamily="2" charset="0"/>
+                <a:ea typeface="+mn-ea"/>
+                <a:cs typeface="+mn-cs"/>
+              </a:rPr>
+              <a:t>END</a:t>
+            </a:r>
+          </a:p>
+        </p:txBody>
+      </p:sp>
     </p:spTree>
     <p:extLst>
       <p:ext uri="{BB962C8B-B14F-4D97-AF65-F5344CB8AC3E}">
@@ -5139,7 +5204,7 @@
                 <a:latin typeface="Avenir Medium" panose="02000503020000020003" pitchFamily="2" charset="0"/>
                 <a:ea typeface="Bodoni Ornaments" pitchFamily="2" charset="0"/>
               </a:rPr>
-              <a:t>  </a:t>
+              <a:t> </a:t>
             </a:r>
             <a:r>
               <a:rPr lang="en-US" sz="3600" dirty="0">
@@ -5155,7 +5220,7 @@
           <a:p>
             <a:pPr algn="l"/>
             <a:r>
-              <a:rPr lang="en-US" sz="4400" dirty="0">
+              <a:rPr lang="en-US" sz="3600" dirty="0">
                 <a:solidFill>
                   <a:schemeClr val="bg1"/>
                 </a:solidFill>
@@ -5175,13 +5240,13 @@
                 <a:latin typeface="Avenir Medium" panose="02000503020000020003" pitchFamily="2" charset="0"/>
                 <a:ea typeface="Bodoni Ornaments" pitchFamily="2" charset="0"/>
               </a:rPr>
-              <a:t>        G                                   C</a:t>
-            </a:r>
-          </a:p>
-          <a:p>
-            <a:pPr algn="l"/>
-            <a:r>
-              <a:rPr lang="en-US" sz="4400" dirty="0">
+              <a:t>       G                            C</a:t>
+            </a:r>
+          </a:p>
+          <a:p>
+            <a:pPr algn="l"/>
+            <a:r>
+              <a:rPr lang="en-US" sz="3600" dirty="0">
                 <a:solidFill>
                   <a:schemeClr val="bg1"/>
                 </a:solidFill>
@@ -5201,13 +5266,13 @@
                 <a:latin typeface="Avenir Medium" panose="02000503020000020003" pitchFamily="2" charset="0"/>
                 <a:ea typeface="Bodoni Ornaments" pitchFamily="2" charset="0"/>
               </a:rPr>
-              <a:t>                 Am                                     F</a:t>
-            </a:r>
-          </a:p>
-          <a:p>
-            <a:pPr algn="l"/>
-            <a:r>
-              <a:rPr lang="en-US" sz="4400" dirty="0">
+              <a:t>              Am                             F</a:t>
+            </a:r>
+          </a:p>
+          <a:p>
+            <a:pPr algn="l"/>
+            <a:r>
+              <a:rPr lang="en-US" sz="3600" dirty="0">
                 <a:solidFill>
                   <a:schemeClr val="bg1"/>
                 </a:solidFill>
@@ -5227,13 +5292,13 @@
                 <a:latin typeface="Avenir Medium" panose="02000503020000020003" pitchFamily="2" charset="0"/>
                 <a:ea typeface="Bodoni Ornaments" pitchFamily="2" charset="0"/>
               </a:rPr>
-              <a:t>               C                 G        C</a:t>
-            </a:r>
-          </a:p>
-          <a:p>
-            <a:pPr algn="l"/>
-            <a:r>
-              <a:rPr lang="en-US" sz="4400" dirty="0">
+              <a:t>            C            G      C</a:t>
+            </a:r>
+          </a:p>
+          <a:p>
+            <a:pPr algn="l"/>
+            <a:r>
+              <a:rPr lang="en-US" sz="3600" dirty="0">
                 <a:solidFill>
                   <a:schemeClr val="bg1"/>
                 </a:solidFill>
@@ -5452,7 +5517,7 @@
         <p:cNvPr id="1" name="">
           <a:extLst>
             <a:ext uri="{FF2B5EF4-FFF2-40B4-BE49-F238E27FC236}">
-              <a16:creationId xmlns:a16="http://schemas.microsoft.com/office/drawing/2014/main" id="{105C7419-E011-28A7-9A00-12DEA80269EF}"/>
+              <a16:creationId xmlns:a16="http://schemas.microsoft.com/office/drawing/2014/main" id="{6452EE02-2A72-4F10-BE79-22C84E7AC76E}"/>
             </a:ext>
           </a:extLst>
         </p:cNvPr>
@@ -5472,7 +5537,7 @@
           <p:cNvPr id="3" name="Subtitle 2">
             <a:extLst>
               <a:ext uri="{FF2B5EF4-FFF2-40B4-BE49-F238E27FC236}">
-                <a16:creationId xmlns:a16="http://schemas.microsoft.com/office/drawing/2014/main" id="{76DA5D01-CA66-E4A3-D9BB-F19A657F5172}"/>
+                <a16:creationId xmlns:a16="http://schemas.microsoft.com/office/drawing/2014/main" id="{8C7C506D-C8DB-6DDF-A8D1-F2F2FFE1676E}"/>
               </a:ext>
             </a:extLst>
           </p:cNvPr>
@@ -5504,13 +5569,13 @@
                 <a:latin typeface="Avenir Medium" panose="02000503020000020003" pitchFamily="2" charset="0"/>
                 <a:ea typeface="Bodoni Ornaments" pitchFamily="2" charset="0"/>
               </a:rPr>
-              <a:t>C                        Am</a:t>
-            </a:r>
-          </a:p>
-          <a:p>
-            <a:pPr algn="l"/>
-            <a:r>
-              <a:rPr lang="en-US" sz="4400" dirty="0">
+              <a:t>C                   Am</a:t>
+            </a:r>
+          </a:p>
+          <a:p>
+            <a:pPr algn="l"/>
+            <a:r>
+              <a:rPr lang="en-US" sz="3600" dirty="0">
                 <a:solidFill>
                   <a:schemeClr val="bg1"/>
                 </a:solidFill>
@@ -5530,13 +5595,13 @@
                 <a:latin typeface="Avenir Medium" panose="02000503020000020003" pitchFamily="2" charset="0"/>
                 <a:ea typeface="Bodoni Ornaments" pitchFamily="2" charset="0"/>
               </a:rPr>
-              <a:t>C                     G</a:t>
-            </a:r>
-          </a:p>
-          <a:p>
-            <a:pPr algn="l"/>
-            <a:r>
-              <a:rPr lang="en-US" sz="4400" dirty="0">
+              <a:t>C                 G</a:t>
+            </a:r>
+          </a:p>
+          <a:p>
+            <a:pPr algn="l"/>
+            <a:r>
+              <a:rPr lang="en-US" sz="3600" dirty="0">
                 <a:solidFill>
                   <a:schemeClr val="bg1"/>
                 </a:solidFill>
@@ -5556,13 +5621,13 @@
                 <a:latin typeface="Avenir Medium" panose="02000503020000020003" pitchFamily="2" charset="0"/>
                 <a:ea typeface="Bodoni Ornaments" pitchFamily="2" charset="0"/>
               </a:rPr>
-              <a:t>C                         F</a:t>
-            </a:r>
-          </a:p>
-          <a:p>
-            <a:pPr algn="l"/>
-            <a:r>
-              <a:rPr lang="en-US" sz="4400" dirty="0">
+              <a:t>C                    F</a:t>
+            </a:r>
+          </a:p>
+          <a:p>
+            <a:pPr algn="l"/>
+            <a:r>
+              <a:rPr lang="en-US" sz="3600" dirty="0">
                 <a:solidFill>
                   <a:schemeClr val="bg1"/>
                 </a:solidFill>
@@ -5582,13 +5647,13 @@
                 <a:latin typeface="Avenir Medium" panose="02000503020000020003" pitchFamily="2" charset="0"/>
                 <a:ea typeface="Bodoni Ornaments" pitchFamily="2" charset="0"/>
               </a:rPr>
-              <a:t>       C                  G              C</a:t>
-            </a:r>
-          </a:p>
-          <a:p>
-            <a:pPr algn="l"/>
-            <a:r>
-              <a:rPr lang="en-US" sz="4400" dirty="0">
+              <a:t>       C            G            C</a:t>
+            </a:r>
+          </a:p>
+          <a:p>
+            <a:pPr algn="l"/>
+            <a:r>
+              <a:rPr lang="en-US" sz="3600" dirty="0">
                 <a:solidFill>
                   <a:schemeClr val="bg1"/>
                 </a:solidFill>
@@ -5603,7 +5668,7 @@
     </p:spTree>
     <p:extLst>
       <p:ext uri="{BB962C8B-B14F-4D97-AF65-F5344CB8AC3E}">
-        <p14:creationId xmlns:p14="http://schemas.microsoft.com/office/powerpoint/2010/main" val="1212317863"/>
+        <p14:creationId xmlns:p14="http://schemas.microsoft.com/office/powerpoint/2010/main" val="2860246178"/>
       </p:ext>
     </p:extLst>
   </p:cSld>
@@ -5687,7 +5752,7 @@
           <a:p>
             <a:pPr algn="l"/>
             <a:r>
-              <a:rPr lang="en-US" sz="4400" dirty="0">
+              <a:rPr lang="en-US" sz="3600" dirty="0">
                 <a:solidFill>
                   <a:schemeClr val="bg1"/>
                 </a:solidFill>
@@ -5707,13 +5772,13 @@
                 <a:latin typeface="Avenir Medium" panose="02000503020000020003" pitchFamily="2" charset="0"/>
                 <a:ea typeface="Bodoni Ornaments" pitchFamily="2" charset="0"/>
               </a:rPr>
-              <a:t>G                                       C</a:t>
-            </a:r>
-          </a:p>
-          <a:p>
-            <a:pPr algn="l"/>
-            <a:r>
-              <a:rPr lang="en-US" sz="4400" dirty="0">
+              <a:t>G                               C</a:t>
+            </a:r>
+          </a:p>
+          <a:p>
+            <a:pPr algn="l"/>
+            <a:r>
+              <a:rPr lang="en-US" sz="3600" dirty="0">
                 <a:solidFill>
                   <a:schemeClr val="bg1"/>
                 </a:solidFill>
@@ -5723,7 +5788,7 @@
               <a:t>Thy </a:t>
             </a:r>
             <a:r>
-              <a:rPr lang="en-US" sz="4400" dirty="0" err="1">
+              <a:rPr lang="en-US" sz="3600" dirty="0" err="1">
                 <a:solidFill>
                   <a:schemeClr val="bg1"/>
                 </a:solidFill>
@@ -5733,7 +5798,7 @@
               <a:t>pow'r</a:t>
             </a:r>
             <a:r>
-              <a:rPr lang="en-US" sz="4400" dirty="0">
+              <a:rPr lang="en-US" sz="3600" dirty="0">
                 <a:solidFill>
                   <a:schemeClr val="bg1"/>
                 </a:solidFill>
@@ -5753,13 +5818,13 @@
                 <a:latin typeface="Avenir Medium" panose="02000503020000020003" pitchFamily="2" charset="0"/>
                 <a:ea typeface="Bodoni Ornaments" pitchFamily="2" charset="0"/>
               </a:rPr>
-              <a:t>Am                                         F</a:t>
-            </a:r>
-          </a:p>
-          <a:p>
-            <a:pPr algn="l"/>
-            <a:r>
-              <a:rPr lang="en-US" sz="4400" dirty="0">
+              <a:t>Am                                 F</a:t>
+            </a:r>
+          </a:p>
+          <a:p>
+            <a:pPr algn="l"/>
+            <a:r>
+              <a:rPr lang="en-US" sz="3600" dirty="0">
                 <a:solidFill>
                   <a:schemeClr val="bg1"/>
                 </a:solidFill>
@@ -5828,7 +5893,7 @@
         <p:cNvPr id="1" name="">
           <a:extLst>
             <a:ext uri="{FF2B5EF4-FFF2-40B4-BE49-F238E27FC236}">
-              <a16:creationId xmlns:a16="http://schemas.microsoft.com/office/drawing/2014/main" id="{55FED0BD-7288-6664-B398-20315864A212}"/>
+              <a16:creationId xmlns:a16="http://schemas.microsoft.com/office/drawing/2014/main" id="{316F0AF7-D00B-B497-81A8-49AB0F2D69FC}"/>
             </a:ext>
           </a:extLst>
         </p:cNvPr>
@@ -5848,7 +5913,7 @@
           <p:cNvPr id="3" name="Subtitle 2">
             <a:extLst>
               <a:ext uri="{FF2B5EF4-FFF2-40B4-BE49-F238E27FC236}">
-                <a16:creationId xmlns:a16="http://schemas.microsoft.com/office/drawing/2014/main" id="{0ECDD8E7-01E1-7510-E28F-160CA71BEFC2}"/>
+                <a16:creationId xmlns:a16="http://schemas.microsoft.com/office/drawing/2014/main" id="{7566DE7C-76F7-2441-63BD-C1F6F0BB234B}"/>
               </a:ext>
             </a:extLst>
           </p:cNvPr>
@@ -5880,13 +5945,13 @@
                 <a:latin typeface="Avenir Medium" panose="02000503020000020003" pitchFamily="2" charset="0"/>
                 <a:ea typeface="Bodoni Ornaments" pitchFamily="2" charset="0"/>
               </a:rPr>
-              <a:t>C                        Am</a:t>
-            </a:r>
-          </a:p>
-          <a:p>
-            <a:pPr algn="l"/>
-            <a:r>
-              <a:rPr lang="en-US" sz="4400" dirty="0">
+              <a:t>C                   Am</a:t>
+            </a:r>
+          </a:p>
+          <a:p>
+            <a:pPr algn="l"/>
+            <a:r>
+              <a:rPr lang="en-US" sz="3600" dirty="0">
                 <a:solidFill>
                   <a:schemeClr val="bg1"/>
                 </a:solidFill>
@@ -5906,13 +5971,13 @@
                 <a:latin typeface="Avenir Medium" panose="02000503020000020003" pitchFamily="2" charset="0"/>
                 <a:ea typeface="Bodoni Ornaments" pitchFamily="2" charset="0"/>
               </a:rPr>
-              <a:t>C                     G</a:t>
-            </a:r>
-          </a:p>
-          <a:p>
-            <a:pPr algn="l"/>
-            <a:r>
-              <a:rPr lang="en-US" sz="4400" dirty="0">
+              <a:t>C                 G</a:t>
+            </a:r>
+          </a:p>
+          <a:p>
+            <a:pPr algn="l"/>
+            <a:r>
+              <a:rPr lang="en-US" sz="3600" dirty="0">
                 <a:solidFill>
                   <a:schemeClr val="bg1"/>
                 </a:solidFill>
@@ -5932,13 +5997,13 @@
                 <a:latin typeface="Avenir Medium" panose="02000503020000020003" pitchFamily="2" charset="0"/>
                 <a:ea typeface="Bodoni Ornaments" pitchFamily="2" charset="0"/>
               </a:rPr>
-              <a:t>C                         F</a:t>
-            </a:r>
-          </a:p>
-          <a:p>
-            <a:pPr algn="l"/>
-            <a:r>
-              <a:rPr lang="en-US" sz="4400" dirty="0">
+              <a:t>C                    F</a:t>
+            </a:r>
+          </a:p>
+          <a:p>
+            <a:pPr algn="l"/>
+            <a:r>
+              <a:rPr lang="en-US" sz="3600" dirty="0">
                 <a:solidFill>
                   <a:schemeClr val="bg1"/>
                 </a:solidFill>
@@ -5958,13 +6023,13 @@
                 <a:latin typeface="Avenir Medium" panose="02000503020000020003" pitchFamily="2" charset="0"/>
                 <a:ea typeface="Bodoni Ornaments" pitchFamily="2" charset="0"/>
               </a:rPr>
-              <a:t>       C                  G              C</a:t>
-            </a:r>
-          </a:p>
-          <a:p>
-            <a:pPr algn="l"/>
-            <a:r>
-              <a:rPr lang="en-US" sz="4400" dirty="0">
+              <a:t>       C            G            C</a:t>
+            </a:r>
+          </a:p>
+          <a:p>
+            <a:pPr algn="l"/>
+            <a:r>
+              <a:rPr lang="en-US" sz="3600" dirty="0">
                 <a:solidFill>
                   <a:schemeClr val="bg1"/>
                 </a:solidFill>
@@ -5979,7 +6044,7 @@
     </p:spTree>
     <p:extLst>
       <p:ext uri="{BB962C8B-B14F-4D97-AF65-F5344CB8AC3E}">
-        <p14:creationId xmlns:p14="http://schemas.microsoft.com/office/powerpoint/2010/main" val="2095619529"/>
+        <p14:creationId xmlns:p14="http://schemas.microsoft.com/office/powerpoint/2010/main" val="1700872"/>
       </p:ext>
     </p:extLst>
   </p:cSld>
@@ -6057,13 +6122,13 @@
                 <a:latin typeface="Avenir Medium" panose="02000503020000020003" pitchFamily="2" charset="0"/>
                 <a:ea typeface="Bodoni Ornaments" pitchFamily="2" charset="0"/>
               </a:rPr>
-              <a:t>         C</a:t>
-            </a:r>
-          </a:p>
-          <a:p>
-            <a:pPr algn="l"/>
-            <a:r>
-              <a:rPr lang="en-US" sz="4400" dirty="0">
+              <a:t>       C</a:t>
+            </a:r>
+          </a:p>
+          <a:p>
+            <a:pPr algn="l"/>
+            <a:r>
+              <a:rPr lang="en-US" sz="3600" dirty="0">
                 <a:solidFill>
                   <a:schemeClr val="bg1"/>
                 </a:solidFill>
@@ -6083,17 +6148,17 @@
                 <a:latin typeface="Avenir Medium" panose="02000503020000020003" pitchFamily="2" charset="0"/>
                 <a:ea typeface="Bodoni Ornaments" pitchFamily="2" charset="0"/>
               </a:rPr>
-              <a:t>   </a:t>
-            </a:r>
-            <a:r>
-              <a:rPr lang="en-US" sz="3600" dirty="0">
-                <a:solidFill>
-                  <a:srgbClr val="FFFF00"/>
-                </a:solidFill>
-                <a:latin typeface="Avenir Medium" panose="02000503020000020003" pitchFamily="2" charset="0"/>
-                <a:ea typeface="Bodoni Ornaments" pitchFamily="2" charset="0"/>
-              </a:rPr>
-              <a:t>G                       C</a:t>
+              <a:t>  </a:t>
+            </a:r>
+            <a:r>
+              <a:rPr lang="en-US" sz="3600" dirty="0">
+                <a:solidFill>
+                  <a:srgbClr val="FFFF00"/>
+                </a:solidFill>
+                <a:latin typeface="Avenir Medium" panose="02000503020000020003" pitchFamily="2" charset="0"/>
+                <a:ea typeface="Bodoni Ornaments" pitchFamily="2" charset="0"/>
+              </a:rPr>
+              <a:t>G                   C</a:t>
             </a:r>
             <a:endParaRPr lang="en-US" sz="3600" dirty="0">
               <a:solidFill>
@@ -6106,7 +6171,7 @@
           <a:p>
             <a:pPr algn="l"/>
             <a:r>
-              <a:rPr lang="en-US" sz="4400" dirty="0">
+              <a:rPr lang="en-US" sz="3600" dirty="0">
                 <a:solidFill>
                   <a:schemeClr val="bg1"/>
                 </a:solidFill>
@@ -6126,13 +6191,13 @@
                 <a:latin typeface="Avenir Medium" panose="02000503020000020003" pitchFamily="2" charset="0"/>
                 <a:ea typeface="Bodoni Ornaments" pitchFamily="2" charset="0"/>
               </a:rPr>
-              <a:t>            Am                          F</a:t>
-            </a:r>
-          </a:p>
-          <a:p>
-            <a:pPr algn="l"/>
-            <a:r>
-              <a:rPr lang="en-US" sz="4400" dirty="0">
+              <a:t>          Am                     F</a:t>
+            </a:r>
+          </a:p>
+          <a:p>
+            <a:pPr algn="l"/>
+            <a:r>
+              <a:rPr lang="en-US" sz="3600" dirty="0">
                 <a:solidFill>
                   <a:schemeClr val="bg1"/>
                 </a:solidFill>
@@ -6152,13 +6217,13 @@
                 <a:latin typeface="Avenir Medium" panose="02000503020000020003" pitchFamily="2" charset="0"/>
                 <a:ea typeface="Bodoni Ornaments" pitchFamily="2" charset="0"/>
               </a:rPr>
-              <a:t>       C               G      C</a:t>
-            </a:r>
-          </a:p>
-          <a:p>
-            <a:pPr algn="l"/>
-            <a:r>
-              <a:rPr lang="en-US" sz="4400" dirty="0">
+              <a:t>      C            G    C</a:t>
+            </a:r>
+          </a:p>
+          <a:p>
+            <a:pPr algn="l"/>
+            <a:r>
+              <a:rPr lang="en-US" sz="3600" dirty="0">
                 <a:solidFill>
                   <a:schemeClr val="bg1"/>
                 </a:solidFill>
@@ -6253,13 +6318,13 @@
                 <a:latin typeface="Avenir Medium" panose="02000503020000020003" pitchFamily="2" charset="0"/>
                 <a:ea typeface="Bodoni Ornaments" pitchFamily="2" charset="0"/>
               </a:rPr>
-              <a:t>C                        Am</a:t>
-            </a:r>
-          </a:p>
-          <a:p>
-            <a:pPr algn="l"/>
-            <a:r>
-              <a:rPr lang="en-US" sz="4400" dirty="0">
+              <a:t>C                   Am</a:t>
+            </a:r>
+          </a:p>
+          <a:p>
+            <a:pPr algn="l"/>
+            <a:r>
+              <a:rPr lang="en-US" sz="3600" dirty="0">
                 <a:solidFill>
                   <a:schemeClr val="bg1"/>
                 </a:solidFill>
@@ -6279,13 +6344,13 @@
                 <a:latin typeface="Avenir Medium" panose="02000503020000020003" pitchFamily="2" charset="0"/>
                 <a:ea typeface="Bodoni Ornaments" pitchFamily="2" charset="0"/>
               </a:rPr>
-              <a:t>C                     G</a:t>
-            </a:r>
-          </a:p>
-          <a:p>
-            <a:pPr algn="l"/>
-            <a:r>
-              <a:rPr lang="en-US" sz="4400" dirty="0">
+              <a:t>C                 G</a:t>
+            </a:r>
+          </a:p>
+          <a:p>
+            <a:pPr algn="l"/>
+            <a:r>
+              <a:rPr lang="en-US" sz="3600" dirty="0">
                 <a:solidFill>
                   <a:schemeClr val="bg1"/>
                 </a:solidFill>
@@ -6305,13 +6370,13 @@
                 <a:latin typeface="Avenir Medium" panose="02000503020000020003" pitchFamily="2" charset="0"/>
                 <a:ea typeface="Bodoni Ornaments" pitchFamily="2" charset="0"/>
               </a:rPr>
-              <a:t>C                         F</a:t>
-            </a:r>
-          </a:p>
-          <a:p>
-            <a:pPr algn="l"/>
-            <a:r>
-              <a:rPr lang="en-US" sz="4400" dirty="0">
+              <a:t>C                    F</a:t>
+            </a:r>
+          </a:p>
+          <a:p>
+            <a:pPr algn="l"/>
+            <a:r>
+              <a:rPr lang="en-US" sz="3600" dirty="0">
                 <a:solidFill>
                   <a:schemeClr val="bg1"/>
                 </a:solidFill>
@@ -6331,13 +6396,13 @@
                 <a:latin typeface="Avenir Medium" panose="02000503020000020003" pitchFamily="2" charset="0"/>
                 <a:ea typeface="Bodoni Ornaments" pitchFamily="2" charset="0"/>
               </a:rPr>
-              <a:t>       C                  G              C</a:t>
-            </a:r>
-          </a:p>
-          <a:p>
-            <a:pPr algn="l"/>
-            <a:r>
-              <a:rPr lang="en-US" sz="4400" dirty="0">
+              <a:t>       C            G            C</a:t>
+            </a:r>
+          </a:p>
+          <a:p>
+            <a:pPr algn="l"/>
+            <a:r>
+              <a:rPr lang="en-US" sz="3600" dirty="0">
                 <a:solidFill>
                   <a:schemeClr val="bg1"/>
                 </a:solidFill>
@@ -6345,6 +6410,46 @@
                 <a:ea typeface="Bodoni Ornaments" pitchFamily="2" charset="0"/>
               </a:rPr>
               <a:t>He washed it white as snow</a:t>
+            </a:r>
+          </a:p>
+        </p:txBody>
+      </p:sp>
+      <p:sp>
+        <p:nvSpPr>
+          <p:cNvPr id="2" name="TextBox 1">
+            <a:extLst>
+              <a:ext uri="{FF2B5EF4-FFF2-40B4-BE49-F238E27FC236}">
+                <a16:creationId xmlns:a16="http://schemas.microsoft.com/office/drawing/2014/main" id="{6E071368-3770-015C-9760-39E3B0C5AD22}"/>
+              </a:ext>
+            </a:extLst>
+          </p:cNvPr>
+          <p:cNvSpPr txBox="1"/>
+          <p:nvPr/>
+        </p:nvSpPr>
+        <p:spPr>
+          <a:xfrm>
+            <a:off x="11277600" y="6378411"/>
+            <a:ext cx="703385" cy="369332"/>
+          </a:xfrm>
+          <a:prstGeom prst="rect">
+            <a:avLst/>
+          </a:prstGeom>
+          <a:noFill/>
+        </p:spPr>
+        <p:txBody>
+          <a:bodyPr wrap="square" rtlCol="0">
+            <a:spAutoFit/>
+          </a:bodyPr>
+          <a:lstStyle/>
+          <a:p>
+            <a:r>
+              <a:rPr lang="en-US" b="1" dirty="0">
+                <a:solidFill>
+                  <a:srgbClr val="FF0000"/>
+                </a:solidFill>
+                <a:latin typeface="Avenir Book" panose="02000503020000020003" pitchFamily="2" charset="0"/>
+              </a:rPr>
+              <a:t>END</a:t>
             </a:r>
           </a:p>
         </p:txBody>
@@ -8385,6 +8490,46 @@
                 <a:ea typeface="Bodoni Ornaments" pitchFamily="2" charset="0"/>
               </a:rPr>
               <a:t>Oh God, You are my living hope</a:t>
+            </a:r>
+          </a:p>
+        </p:txBody>
+      </p:sp>
+      <p:sp>
+        <p:nvSpPr>
+          <p:cNvPr id="2" name="TextBox 1">
+            <a:extLst>
+              <a:ext uri="{FF2B5EF4-FFF2-40B4-BE49-F238E27FC236}">
+                <a16:creationId xmlns:a16="http://schemas.microsoft.com/office/drawing/2014/main" id="{BBEC02F8-6EB7-4702-31D0-C16F1763BF99}"/>
+              </a:ext>
+            </a:extLst>
+          </p:cNvPr>
+          <p:cNvSpPr txBox="1"/>
+          <p:nvPr/>
+        </p:nvSpPr>
+        <p:spPr>
+          <a:xfrm>
+            <a:off x="11277600" y="6378411"/>
+            <a:ext cx="703385" cy="369332"/>
+          </a:xfrm>
+          <a:prstGeom prst="rect">
+            <a:avLst/>
+          </a:prstGeom>
+          <a:noFill/>
+        </p:spPr>
+        <p:txBody>
+          <a:bodyPr wrap="square" rtlCol="0">
+            <a:spAutoFit/>
+          </a:bodyPr>
+          <a:lstStyle/>
+          <a:p>
+            <a:r>
+              <a:rPr lang="en-US" b="1" dirty="0">
+                <a:solidFill>
+                  <a:srgbClr val="FF0000"/>
+                </a:solidFill>
+                <a:latin typeface="Avenir Book" panose="02000503020000020003" pitchFamily="2" charset="0"/>
+              </a:rPr>
+              <a:t>END</a:t>
             </a:r>
           </a:p>
         </p:txBody>
@@ -9861,6 +10006,46 @@
           </a:p>
         </p:txBody>
       </p:sp>
+      <p:sp>
+        <p:nvSpPr>
+          <p:cNvPr id="2" name="TextBox 1">
+            <a:extLst>
+              <a:ext uri="{FF2B5EF4-FFF2-40B4-BE49-F238E27FC236}">
+                <a16:creationId xmlns:a16="http://schemas.microsoft.com/office/drawing/2014/main" id="{E8E4D267-FD29-7786-DA18-FC68CCC71564}"/>
+              </a:ext>
+            </a:extLst>
+          </p:cNvPr>
+          <p:cNvSpPr txBox="1"/>
+          <p:nvPr/>
+        </p:nvSpPr>
+        <p:spPr>
+          <a:xfrm>
+            <a:off x="11277600" y="6378411"/>
+            <a:ext cx="703385" cy="369332"/>
+          </a:xfrm>
+          <a:prstGeom prst="rect">
+            <a:avLst/>
+          </a:prstGeom>
+          <a:noFill/>
+        </p:spPr>
+        <p:txBody>
+          <a:bodyPr wrap="square" rtlCol="0">
+            <a:spAutoFit/>
+          </a:bodyPr>
+          <a:lstStyle/>
+          <a:p>
+            <a:r>
+              <a:rPr lang="en-US" b="1" dirty="0">
+                <a:solidFill>
+                  <a:srgbClr val="FF0000"/>
+                </a:solidFill>
+                <a:latin typeface="Avenir Book" panose="02000503020000020003" pitchFamily="2" charset="0"/>
+              </a:rPr>
+              <a:t>END</a:t>
+            </a:r>
+          </a:p>
+        </p:txBody>
+      </p:sp>
     </p:spTree>
     <p:extLst>
       <p:ext uri="{BB962C8B-B14F-4D97-AF65-F5344CB8AC3E}">
@@ -10441,6 +10626,71 @@
               <a:latin typeface="Avenir Medium" panose="02000503020000020003" pitchFamily="2" charset="0"/>
               <a:ea typeface="Bodoni Ornaments" pitchFamily="2" charset="0"/>
             </a:endParaRPr>
+          </a:p>
+        </p:txBody>
+      </p:sp>
+      <p:sp>
+        <p:nvSpPr>
+          <p:cNvPr id="2" name="TextBox 1">
+            <a:extLst>
+              <a:ext uri="{FF2B5EF4-FFF2-40B4-BE49-F238E27FC236}">
+                <a16:creationId xmlns:a16="http://schemas.microsoft.com/office/drawing/2014/main" id="{949B6E8A-6FEF-5F04-25F3-8ADC54F9BF22}"/>
+              </a:ext>
+            </a:extLst>
+          </p:cNvPr>
+          <p:cNvSpPr txBox="1"/>
+          <p:nvPr/>
+        </p:nvSpPr>
+        <p:spPr>
+          <a:xfrm>
+            <a:off x="11277600" y="6378411"/>
+            <a:ext cx="703385" cy="369332"/>
+          </a:xfrm>
+          <a:prstGeom prst="rect">
+            <a:avLst/>
+          </a:prstGeom>
+          <a:noFill/>
+        </p:spPr>
+        <p:txBody>
+          <a:bodyPr wrap="square" rtlCol="0">
+            <a:spAutoFit/>
+          </a:bodyPr>
+          <a:lstStyle/>
+          <a:p>
+            <a:pPr marL="0" marR="0" lvl="0" indent="0" algn="l" defTabSz="914400" rtl="0" eaLnBrk="1" fontAlgn="auto" latinLnBrk="0" hangingPunct="1">
+              <a:lnSpc>
+                <a:spcPct val="100000"/>
+              </a:lnSpc>
+              <a:spcBef>
+                <a:spcPts val="0"/>
+              </a:spcBef>
+              <a:spcAft>
+                <a:spcPts val="0"/>
+              </a:spcAft>
+              <a:buClrTx/>
+              <a:buSzTx/>
+              <a:buFontTx/>
+              <a:buNone/>
+              <a:tabLst/>
+              <a:defRPr/>
+            </a:pPr>
+            <a:r>
+              <a:rPr kumimoji="0" lang="en-US" sz="1800" b="1" i="0" u="none" strike="noStrike" kern="1200" cap="none" spc="0" normalizeH="0" baseline="0" noProof="0" dirty="0">
+                <a:ln>
+                  <a:noFill/>
+                </a:ln>
+                <a:solidFill>
+                  <a:srgbClr val="FF0000"/>
+                </a:solidFill>
+                <a:effectLst/>
+                <a:uLnTx/>
+                <a:uFillTx/>
+                <a:latin typeface="Avenir Book" panose="02000503020000020003" pitchFamily="2" charset="0"/>
+                <a:ea typeface="+mn-ea"/>
+                <a:cs typeface="+mn-cs"/>
+              </a:rPr>
+              <a:t>END</a:t>
+            </a:r>
           </a:p>
         </p:txBody>
       </p:sp>

--- a/2026-04-03 El Camino Set (CHORDS).pptx
+++ b/2026-04-03 El Camino Set (CHORDS).pptx
@@ -5461,7 +5461,7 @@
                 <a:latin typeface="Avenir Medium" panose="02000503020000020003" pitchFamily="2" charset="0"/>
                 <a:ea typeface="Bodoni Ornaments" pitchFamily="2" charset="0"/>
               </a:rPr>
-              <a:t>       A                Bm     D</a:t>
+              <a:t>       A                Bm     G</a:t>
             </a:r>
             <a:endParaRPr lang="en-US" sz="4400" dirty="0">
               <a:solidFill>
@@ -7811,7 +7811,7 @@
                 <a:latin typeface="Avenir Medium" panose="02000503020000020003" pitchFamily="2" charset="0"/>
                 <a:ea typeface="Bodoni Ornaments" pitchFamily="2" charset="0"/>
               </a:rPr>
-              <a:t>                D                         Em   D</a:t>
+              <a:t>                D                         Em</a:t>
             </a:r>
           </a:p>
           <a:p>
@@ -7851,6 +7851,45 @@
                 <a:ea typeface="Bodoni Ornaments" pitchFamily="2" charset="0"/>
               </a:rPr>
               <a:t>Jesus Christ, my living hope</a:t>
+            </a:r>
+          </a:p>
+        </p:txBody>
+      </p:sp>
+      <p:sp>
+        <p:nvSpPr>
+          <p:cNvPr id="2" name="TextBox 1">
+            <a:extLst>
+              <a:ext uri="{FF2B5EF4-FFF2-40B4-BE49-F238E27FC236}">
+                <a16:creationId xmlns:a16="http://schemas.microsoft.com/office/drawing/2014/main" id="{5066690B-73CA-35F3-1B0E-C1A24C2E0A40}"/>
+              </a:ext>
+            </a:extLst>
+          </p:cNvPr>
+          <p:cNvSpPr txBox="1"/>
+          <p:nvPr/>
+        </p:nvSpPr>
+        <p:spPr>
+          <a:xfrm>
+            <a:off x="10981630" y="6360298"/>
+            <a:ext cx="1055077" cy="369332"/>
+          </a:xfrm>
+          <a:prstGeom prst="rect">
+            <a:avLst/>
+          </a:prstGeom>
+          <a:noFill/>
+        </p:spPr>
+        <p:txBody>
+          <a:bodyPr wrap="square" rtlCol="0">
+            <a:spAutoFit/>
+          </a:bodyPr>
+          <a:lstStyle/>
+          <a:p>
+            <a:r>
+              <a:rPr lang="en-US" b="1" dirty="0">
+                <a:solidFill>
+                  <a:srgbClr val="FFFF00"/>
+                </a:solidFill>
+              </a:rPr>
+              <a:t>REPEAT</a:t>
             </a:r>
           </a:p>
         </p:txBody>
@@ -8098,6 +8137,45 @@
               <a:latin typeface="Avenir Medium" panose="02000503020000020003" pitchFamily="2" charset="0"/>
               <a:ea typeface="Bodoni Ornaments" pitchFamily="2" charset="0"/>
             </a:endParaRPr>
+          </a:p>
+        </p:txBody>
+      </p:sp>
+      <p:sp>
+        <p:nvSpPr>
+          <p:cNvPr id="2" name="TextBox 1">
+            <a:extLst>
+              <a:ext uri="{FF2B5EF4-FFF2-40B4-BE49-F238E27FC236}">
+                <a16:creationId xmlns:a16="http://schemas.microsoft.com/office/drawing/2014/main" id="{85855288-599F-5666-D3A8-B14A2E27D51A}"/>
+              </a:ext>
+            </a:extLst>
+          </p:cNvPr>
+          <p:cNvSpPr txBox="1"/>
+          <p:nvPr/>
+        </p:nvSpPr>
+        <p:spPr>
+          <a:xfrm>
+            <a:off x="10981630" y="6360298"/>
+            <a:ext cx="1055077" cy="369332"/>
+          </a:xfrm>
+          <a:prstGeom prst="rect">
+            <a:avLst/>
+          </a:prstGeom>
+          <a:noFill/>
+        </p:spPr>
+        <p:txBody>
+          <a:bodyPr wrap="square" rtlCol="0">
+            <a:spAutoFit/>
+          </a:bodyPr>
+          <a:lstStyle/>
+          <a:p>
+            <a:r>
+              <a:rPr lang="en-US" b="1" dirty="0">
+                <a:solidFill>
+                  <a:srgbClr val="FFFF00"/>
+                </a:solidFill>
+              </a:rPr>
+              <a:t>REPEAT</a:t>
+            </a:r>
           </a:p>
         </p:txBody>
       </p:sp>
@@ -8313,7 +8391,7 @@
                 <a:latin typeface="Avenir Medium" panose="02000503020000020003" pitchFamily="2" charset="0"/>
                 <a:ea typeface="Bodoni Ornaments" pitchFamily="2" charset="0"/>
               </a:rPr>
-              <a:t>                D                         Em   D</a:t>
+              <a:t>                D                         Em</a:t>
             </a:r>
           </a:p>
           <a:p>
@@ -8353,6 +8431,45 @@
                 <a:ea typeface="Bodoni Ornaments" pitchFamily="2" charset="0"/>
               </a:rPr>
               <a:t>Jesus Christ, my living hope</a:t>
+            </a:r>
+          </a:p>
+        </p:txBody>
+      </p:sp>
+      <p:sp>
+        <p:nvSpPr>
+          <p:cNvPr id="2" name="TextBox 1">
+            <a:extLst>
+              <a:ext uri="{FF2B5EF4-FFF2-40B4-BE49-F238E27FC236}">
+                <a16:creationId xmlns:a16="http://schemas.microsoft.com/office/drawing/2014/main" id="{133F03DC-4D44-0F22-0D64-0E9D6C826187}"/>
+              </a:ext>
+            </a:extLst>
+          </p:cNvPr>
+          <p:cNvSpPr txBox="1"/>
+          <p:nvPr/>
+        </p:nvSpPr>
+        <p:spPr>
+          <a:xfrm>
+            <a:off x="10981630" y="6360298"/>
+            <a:ext cx="1055077" cy="369332"/>
+          </a:xfrm>
+          <a:prstGeom prst="rect">
+            <a:avLst/>
+          </a:prstGeom>
+          <a:noFill/>
+        </p:spPr>
+        <p:txBody>
+          <a:bodyPr wrap="square" rtlCol="0">
+            <a:spAutoFit/>
+          </a:bodyPr>
+          <a:lstStyle/>
+          <a:p>
+            <a:r>
+              <a:rPr lang="en-US" b="1" dirty="0">
+                <a:solidFill>
+                  <a:srgbClr val="FFFF00"/>
+                </a:solidFill>
+              </a:rPr>
+              <a:t>REPEAT</a:t>
             </a:r>
           </a:p>
         </p:txBody>
@@ -9449,7 +9566,7 @@
                 <a:latin typeface="Avenir Medium" panose="02000503020000020003" pitchFamily="2" charset="0"/>
                 <a:ea typeface="Bodoni Ornaments" pitchFamily="2" charset="0"/>
               </a:rPr>
-              <a:t>Am     G</a:t>
+              <a:t>           Am</a:t>
             </a:r>
           </a:p>
           <a:p>
@@ -9475,7 +9592,7 @@
                 <a:latin typeface="Avenir Medium" panose="02000503020000020003" pitchFamily="2" charset="0"/>
                 <a:ea typeface="Bodoni Ornaments" pitchFamily="2" charset="0"/>
               </a:rPr>
-              <a:t>               C</a:t>
+              <a:t>               F    G</a:t>
             </a:r>
           </a:p>
           <a:p>
@@ -10387,7 +10504,7 @@
                 <a:latin typeface="Avenir Medium" panose="02000503020000020003" pitchFamily="2" charset="0"/>
                 <a:ea typeface="Bodoni Ornaments" pitchFamily="2" charset="0"/>
               </a:rPr>
-              <a:t>A                           Bm     D</a:t>
+              <a:t>A                           Bm     G</a:t>
             </a:r>
             <a:endParaRPr lang="en-US" sz="3600" dirty="0">
               <a:solidFill>
